--- a/catalog/editorial/templates/ed_cards_rows_6.pptx
+++ b/catalog/editorial/templates/ed_cards_rows_6.pptx
@@ -3577,7 +3577,7 @@
           <a:noFill/>
         </p:spPr>
         <p:txBody>
-          <a:bodyPr wrap="square" lIns="18288" rIns="18288" tIns="13716" bIns="13716">
+          <a:bodyPr wrap="square" anchor="t" lIns="18288" rIns="18288" tIns="13716" bIns="13716">
             <a:noAutofit/>
           </a:bodyPr>
           <a:lstStyle/>
@@ -3632,7 +3632,7 @@
           <a:noFill/>
         </p:spPr>
         <p:txBody>
-          <a:bodyPr wrap="square" lIns="18288" rIns="18288" tIns="13716" bIns="13716">
+          <a:bodyPr wrap="square" anchor="t" lIns="18288" rIns="18288" tIns="13716" bIns="13716">
             <a:noAutofit/>
           </a:bodyPr>
           <a:lstStyle/>
@@ -3687,7 +3687,7 @@
           <a:noFill/>
         </p:spPr>
         <p:txBody>
-          <a:bodyPr wrap="square" lIns="18288" rIns="18288" tIns="13716" bIns="13716">
+          <a:bodyPr wrap="square" anchor="t" lIns="18288" rIns="18288" tIns="13716" bIns="13716">
             <a:noAutofit/>
           </a:bodyPr>
           <a:lstStyle/>
@@ -3786,7 +3786,7 @@
           <a:noFill/>
         </p:spPr>
         <p:txBody>
-          <a:bodyPr wrap="square" lIns="18288" rIns="18288" tIns="13716" bIns="13716">
+          <a:bodyPr wrap="square" anchor="t" lIns="18288" rIns="18288" tIns="13716" bIns="13716">
             <a:noAutofit/>
           </a:bodyPr>
           <a:lstStyle/>
@@ -3841,7 +3841,7 @@
           <a:noFill/>
         </p:spPr>
         <p:txBody>
-          <a:bodyPr wrap="square" lIns="18288" rIns="18288" tIns="13716" bIns="13716">
+          <a:bodyPr wrap="square" anchor="t" lIns="18288" rIns="18288" tIns="13716" bIns="13716">
             <a:noAutofit/>
           </a:bodyPr>
           <a:lstStyle/>
@@ -3931,8 +3931,8 @@
         </p:nvSpPr>
         <p:spPr>
           <a:xfrm>
-            <a:off x="685800" y="2130552"/>
-            <a:ext cx="3684117" cy="624840"/>
+            <a:off x="685800" y="2139696"/>
+            <a:ext cx="3684117" cy="597408"/>
           </a:xfrm>
           <a:prstGeom prst="rect">
             <a:avLst/>
@@ -3940,7 +3940,7 @@
           <a:noFill/>
         </p:spPr>
         <p:txBody>
-          <a:bodyPr wrap="square" lIns="18288" rIns="18288" tIns="13716" bIns="13716">
+          <a:bodyPr wrap="square" anchor="ctr" lIns="18288" rIns="18288" tIns="13716" bIns="13716">
             <a:noAutofit/>
           </a:bodyPr>
           <a:lstStyle/>
@@ -3986,8 +3986,8 @@
         </p:nvSpPr>
         <p:spPr>
           <a:xfrm>
-            <a:off x="4580229" y="2130552"/>
-            <a:ext cx="4929530" cy="624840"/>
+            <a:off x="4580229" y="2139696"/>
+            <a:ext cx="4929530" cy="597408"/>
           </a:xfrm>
           <a:prstGeom prst="rect">
             <a:avLst/>
@@ -3995,7 +3995,7 @@
           <a:noFill/>
         </p:spPr>
         <p:txBody>
-          <a:bodyPr wrap="square" lIns="18288" rIns="18288" tIns="13716" bIns="13716">
+          <a:bodyPr wrap="square" anchor="ctr" lIns="18288" rIns="18288" tIns="13716" bIns="13716">
             <a:noAutofit/>
           </a:bodyPr>
           <a:lstStyle/>
@@ -4074,7 +4074,7 @@
         <p:spPr>
           <a:xfrm>
             <a:off x="9646920" y="2139696"/>
-            <a:ext cx="1828800" cy="588264"/>
+            <a:ext cx="1828800" cy="597408"/>
           </a:xfrm>
           <a:prstGeom prst="rect">
             <a:avLst/>
@@ -4082,7 +4082,7 @@
           <a:noFill/>
         </p:spPr>
         <p:txBody>
-          <a:bodyPr wrap="square" lIns="18288" rIns="18288" tIns="13716" bIns="13716">
+          <a:bodyPr wrap="square" anchor="ctr" lIns="18288" rIns="18288" tIns="13716" bIns="13716">
             <a:noAutofit/>
           </a:bodyPr>
           <a:lstStyle/>
@@ -4204,8 +4204,8 @@
         </p:nvSpPr>
         <p:spPr>
           <a:xfrm>
-            <a:off x="685800" y="2782824"/>
-            <a:ext cx="3684117" cy="624840"/>
+            <a:off x="685800" y="2791968"/>
+            <a:ext cx="3684117" cy="597408"/>
           </a:xfrm>
           <a:prstGeom prst="rect">
             <a:avLst/>
@@ -4213,7 +4213,7 @@
           <a:noFill/>
         </p:spPr>
         <p:txBody>
-          <a:bodyPr wrap="square" lIns="18288" rIns="18288" tIns="13716" bIns="13716">
+          <a:bodyPr wrap="square" anchor="ctr" lIns="18288" rIns="18288" tIns="13716" bIns="13716">
             <a:noAutofit/>
           </a:bodyPr>
           <a:lstStyle/>
@@ -4259,8 +4259,8 @@
         </p:nvSpPr>
         <p:spPr>
           <a:xfrm>
-            <a:off x="4580229" y="2782824"/>
-            <a:ext cx="4929530" cy="624840"/>
+            <a:off x="4580229" y="2791968"/>
+            <a:ext cx="4929530" cy="597408"/>
           </a:xfrm>
           <a:prstGeom prst="rect">
             <a:avLst/>
@@ -4268,7 +4268,7 @@
           <a:noFill/>
         </p:spPr>
         <p:txBody>
-          <a:bodyPr wrap="square" lIns="18288" rIns="18288" tIns="13716" bIns="13716">
+          <a:bodyPr wrap="square" anchor="ctr" lIns="18288" rIns="18288" tIns="13716" bIns="13716">
             <a:noAutofit/>
           </a:bodyPr>
           <a:lstStyle/>
@@ -4347,7 +4347,7 @@
         <p:spPr>
           <a:xfrm>
             <a:off x="9646920" y="2791968"/>
-            <a:ext cx="1828800" cy="588264"/>
+            <a:ext cx="1828800" cy="597408"/>
           </a:xfrm>
           <a:prstGeom prst="rect">
             <a:avLst/>
@@ -4355,7 +4355,7 @@
           <a:noFill/>
         </p:spPr>
         <p:txBody>
-          <a:bodyPr wrap="square" lIns="18288" rIns="18288" tIns="13716" bIns="13716">
+          <a:bodyPr wrap="square" anchor="ctr" lIns="18288" rIns="18288" tIns="13716" bIns="13716">
             <a:noAutofit/>
           </a:bodyPr>
           <a:lstStyle/>
@@ -4477,8 +4477,8 @@
         </p:nvSpPr>
         <p:spPr>
           <a:xfrm>
-            <a:off x="685800" y="3435096"/>
-            <a:ext cx="3684117" cy="624840"/>
+            <a:off x="685800" y="3444240"/>
+            <a:ext cx="3684117" cy="597408"/>
           </a:xfrm>
           <a:prstGeom prst="rect">
             <a:avLst/>
@@ -4486,7 +4486,7 @@
           <a:noFill/>
         </p:spPr>
         <p:txBody>
-          <a:bodyPr wrap="square" lIns="18288" rIns="18288" tIns="13716" bIns="13716">
+          <a:bodyPr wrap="square" anchor="ctr" lIns="18288" rIns="18288" tIns="13716" bIns="13716">
             <a:noAutofit/>
           </a:bodyPr>
           <a:lstStyle/>
@@ -4532,8 +4532,8 @@
         </p:nvSpPr>
         <p:spPr>
           <a:xfrm>
-            <a:off x="4580229" y="3435096"/>
-            <a:ext cx="4929530" cy="624840"/>
+            <a:off x="4580229" y="3444240"/>
+            <a:ext cx="4929530" cy="597408"/>
           </a:xfrm>
           <a:prstGeom prst="rect">
             <a:avLst/>
@@ -4541,7 +4541,7 @@
           <a:noFill/>
         </p:spPr>
         <p:txBody>
-          <a:bodyPr wrap="square" lIns="18288" rIns="18288" tIns="13716" bIns="13716">
+          <a:bodyPr wrap="square" anchor="ctr" lIns="18288" rIns="18288" tIns="13716" bIns="13716">
             <a:noAutofit/>
           </a:bodyPr>
           <a:lstStyle/>
@@ -4620,7 +4620,7 @@
         <p:spPr>
           <a:xfrm>
             <a:off x="9646920" y="3444240"/>
-            <a:ext cx="1828800" cy="588264"/>
+            <a:ext cx="1828800" cy="597408"/>
           </a:xfrm>
           <a:prstGeom prst="rect">
             <a:avLst/>
@@ -4628,7 +4628,7 @@
           <a:noFill/>
         </p:spPr>
         <p:txBody>
-          <a:bodyPr wrap="square" lIns="18288" rIns="18288" tIns="13716" bIns="13716">
+          <a:bodyPr wrap="square" anchor="ctr" lIns="18288" rIns="18288" tIns="13716" bIns="13716">
             <a:noAutofit/>
           </a:bodyPr>
           <a:lstStyle/>
@@ -4750,8 +4750,8 @@
         </p:nvSpPr>
         <p:spPr>
           <a:xfrm>
-            <a:off x="685800" y="4087368"/>
-            <a:ext cx="3684117" cy="624840"/>
+            <a:off x="685800" y="4096512"/>
+            <a:ext cx="3684117" cy="597408"/>
           </a:xfrm>
           <a:prstGeom prst="rect">
             <a:avLst/>
@@ -4759,7 +4759,7 @@
           <a:noFill/>
         </p:spPr>
         <p:txBody>
-          <a:bodyPr wrap="square" lIns="18288" rIns="18288" tIns="13716" bIns="13716">
+          <a:bodyPr wrap="square" anchor="ctr" lIns="18288" rIns="18288" tIns="13716" bIns="13716">
             <a:noAutofit/>
           </a:bodyPr>
           <a:lstStyle/>
@@ -4805,8 +4805,8 @@
         </p:nvSpPr>
         <p:spPr>
           <a:xfrm>
-            <a:off x="4580229" y="4087368"/>
-            <a:ext cx="4929530" cy="624840"/>
+            <a:off x="4580229" y="4096512"/>
+            <a:ext cx="4929530" cy="597408"/>
           </a:xfrm>
           <a:prstGeom prst="rect">
             <a:avLst/>
@@ -4814,7 +4814,7 @@
           <a:noFill/>
         </p:spPr>
         <p:txBody>
-          <a:bodyPr wrap="square" lIns="18288" rIns="18288" tIns="13716" bIns="13716">
+          <a:bodyPr wrap="square" anchor="ctr" lIns="18288" rIns="18288" tIns="13716" bIns="13716">
             <a:noAutofit/>
           </a:bodyPr>
           <a:lstStyle/>
@@ -4893,7 +4893,7 @@
         <p:spPr>
           <a:xfrm>
             <a:off x="9646920" y="4096512"/>
-            <a:ext cx="1828800" cy="588264"/>
+            <a:ext cx="1828800" cy="597408"/>
           </a:xfrm>
           <a:prstGeom prst="rect">
             <a:avLst/>
@@ -4901,7 +4901,7 @@
           <a:noFill/>
         </p:spPr>
         <p:txBody>
-          <a:bodyPr wrap="square" lIns="18288" rIns="18288" tIns="13716" bIns="13716">
+          <a:bodyPr wrap="square" anchor="ctr" lIns="18288" rIns="18288" tIns="13716" bIns="13716">
             <a:noAutofit/>
           </a:bodyPr>
           <a:lstStyle/>
@@ -5023,8 +5023,8 @@
         </p:nvSpPr>
         <p:spPr>
           <a:xfrm>
-            <a:off x="685800" y="4739640"/>
-            <a:ext cx="3684117" cy="624840"/>
+            <a:off x="685800" y="4748784"/>
+            <a:ext cx="3684117" cy="597408"/>
           </a:xfrm>
           <a:prstGeom prst="rect">
             <a:avLst/>
@@ -5032,7 +5032,7 @@
           <a:noFill/>
         </p:spPr>
         <p:txBody>
-          <a:bodyPr wrap="square" lIns="18288" rIns="18288" tIns="13716" bIns="13716">
+          <a:bodyPr wrap="square" anchor="ctr" lIns="18288" rIns="18288" tIns="13716" bIns="13716">
             <a:noAutofit/>
           </a:bodyPr>
           <a:lstStyle/>
@@ -5078,8 +5078,8 @@
         </p:nvSpPr>
         <p:spPr>
           <a:xfrm>
-            <a:off x="4580229" y="4739640"/>
-            <a:ext cx="4929530" cy="624840"/>
+            <a:off x="4580229" y="4748784"/>
+            <a:ext cx="4929530" cy="597408"/>
           </a:xfrm>
           <a:prstGeom prst="rect">
             <a:avLst/>
@@ -5087,7 +5087,7 @@
           <a:noFill/>
         </p:spPr>
         <p:txBody>
-          <a:bodyPr wrap="square" lIns="18288" rIns="18288" tIns="13716" bIns="13716">
+          <a:bodyPr wrap="square" anchor="ctr" lIns="18288" rIns="18288" tIns="13716" bIns="13716">
             <a:noAutofit/>
           </a:bodyPr>
           <a:lstStyle/>
@@ -5166,7 +5166,7 @@
         <p:spPr>
           <a:xfrm>
             <a:off x="9646920" y="4748784"/>
-            <a:ext cx="1828800" cy="588264"/>
+            <a:ext cx="1828800" cy="597408"/>
           </a:xfrm>
           <a:prstGeom prst="rect">
             <a:avLst/>
@@ -5174,7 +5174,7 @@
           <a:noFill/>
         </p:spPr>
         <p:txBody>
-          <a:bodyPr wrap="square" lIns="18288" rIns="18288" tIns="13716" bIns="13716">
+          <a:bodyPr wrap="square" anchor="ctr" lIns="18288" rIns="18288" tIns="13716" bIns="13716">
             <a:noAutofit/>
           </a:bodyPr>
           <a:lstStyle/>
@@ -5296,8 +5296,8 @@
         </p:nvSpPr>
         <p:spPr>
           <a:xfrm>
-            <a:off x="685800" y="5391912"/>
-            <a:ext cx="3684117" cy="624840"/>
+            <a:off x="685800" y="5401056"/>
+            <a:ext cx="3684117" cy="597408"/>
           </a:xfrm>
           <a:prstGeom prst="rect">
             <a:avLst/>
@@ -5305,7 +5305,7 @@
           <a:noFill/>
         </p:spPr>
         <p:txBody>
-          <a:bodyPr wrap="square" lIns="18288" rIns="18288" tIns="13716" bIns="13716">
+          <a:bodyPr wrap="square" anchor="ctr" lIns="18288" rIns="18288" tIns="13716" bIns="13716">
             <a:noAutofit/>
           </a:bodyPr>
           <a:lstStyle/>
@@ -5351,8 +5351,8 @@
         </p:nvSpPr>
         <p:spPr>
           <a:xfrm>
-            <a:off x="4580229" y="5391912"/>
-            <a:ext cx="4929530" cy="624840"/>
+            <a:off x="4580229" y="5401056"/>
+            <a:ext cx="4929530" cy="597408"/>
           </a:xfrm>
           <a:prstGeom prst="rect">
             <a:avLst/>
@@ -5360,7 +5360,7 @@
           <a:noFill/>
         </p:spPr>
         <p:txBody>
-          <a:bodyPr wrap="square" lIns="18288" rIns="18288" tIns="13716" bIns="13716">
+          <a:bodyPr wrap="square" anchor="ctr" lIns="18288" rIns="18288" tIns="13716" bIns="13716">
             <a:noAutofit/>
           </a:bodyPr>
           <a:lstStyle/>
@@ -5439,7 +5439,7 @@
         <p:spPr>
           <a:xfrm>
             <a:off x="9646920" y="5401056"/>
-            <a:ext cx="1828800" cy="588264"/>
+            <a:ext cx="1828800" cy="597408"/>
           </a:xfrm>
           <a:prstGeom prst="rect">
             <a:avLst/>
@@ -5447,7 +5447,7 @@
           <a:noFill/>
         </p:spPr>
         <p:txBody>
-          <a:bodyPr wrap="square" lIns="18288" rIns="18288" tIns="13716" bIns="13716">
+          <a:bodyPr wrap="square" anchor="ctr" lIns="18288" rIns="18288" tIns="13716" bIns="13716">
             <a:noAutofit/>
           </a:bodyPr>
           <a:lstStyle/>
